--- a/docs/ahg-2026/repo/read-me.pptx
+++ b/docs/ahg-2026/repo/read-me.pptx
@@ -3663,7 +3663,7 @@
               <a:rPr sz="2000" b="0" lang="en-US">
                 <a:latin typeface="Arial"/>
               </a:rPr>
-              <a:t>Check the workshop code, tick the privacy box, and press Submit new issue.</a:t>
+              <a:t>Check the workshop code, select the privacy check box, and press Submit new issue.</a:t>
             </a:r>
           </a:p>
           <a:p>
